--- a/agila ai mini project.pptx
+++ b/agila ai mini project.pptx
@@ -4931,6 +4931,14 @@
                     <a:bodyPr/>
                     <a:lstStyle/>
                     <a:p>
+                      <a:r>
+                        <a:rPr lang="en-US" altLang="en-GB" dirty="0">
+                          <a:solidFill>
+                            <a:schemeClr val="tx1"/>
+                          </a:solidFill>
+                        </a:rPr>
+                        <a:t>https://github.com/agila1010-creator/suduko-game/blob/main/agila%20ai%20mini%20project.pptx</a:t>
+                      </a:r>
                       <a:endParaRPr lang="en-US" altLang="en-GB" dirty="0">
                         <a:solidFill>
                           <a:schemeClr val="tx1"/>
